--- a/results/reports/proyecto_final/Grupo_9_Video_Pitch_5min.pptx
+++ b/results/reports/proyecto_final/Grupo_9_Video_Pitch_5min.pptx
@@ -1339,7 +1339,7 @@
             <a:r>
               <a:rPr lang="en-US" dirty="0"/>
               <a:t>[3:15–4:00] 5. Evaluación y resultados · Resultados · voz: Jorge
-En la prueba ciega: exactitud 67 %, F1 macro 0.63 con intervalo de 0.53 a 0.72. Frente a la clase mayoritaria, 36 %, y al tipo de norma, 54 %, la diferencia es significativa con McNemar. Kappa con el codificador: 0.54, moderado. Funciona bien en Protección de Datos, F1 0.80, y mal en Administrativo, 0.33, que comparte vocabulario con todo. Lo revelador: 35 de 37 errores revisados eran normas multidimensionales donde el codificador también dudó. En el 86 %, la etiqueta correcta está entre las dos candidatas.</a:t>
+En la prueba ciega: exactitud 67 %, F1 macro 0.63 con intervalo de 0.53 a 0.72. Frente a la clase mayoritaria, 36 %, y al tipo de norma, 54 %, la diferencia es significativa con McNemar. Kappa con el codificador: 0.54, moderado. Funciona bien en Protección de Datos, F1 0.80, y mal en Administrativo, 0.33. Lo revelador: 35 de 37 errores revisados eran normas multidimensionales donde el codificador también dudó. Y la comparación clave: Claude Sonnet con quince ejemplos obtiene 0.64 de exactitud y 0.55 de F1, sin diferencia significativa; un modelo lineal entrenado con 673 normas iguala al LLM, sin coste por llamada y sin enviar texto a terceros.</a:t>
             </a:r>
             <a:endParaRPr lang="en-US" dirty="0"/>
           </a:p>
@@ -1517,7 +1517,7 @@
             <a:r>
               <a:rPr lang="en-US" dirty="0"/>
               <a:t>[4:45–5:00] 7. Cierre · voz: Jorge
-Logro: un sistema de codificación asistida, reproducible, auditado y desplegado, que supera las líneas base y declara dónde no debe usarse. Futuro: multi-etiqueta y más normas del Caribe. Repositorio y aplicación en los QR. Gracias.</a:t>
+Logro: un sistema de codificación asistida, reproducible, auditado y desplegado, que supera las líneas base y declara dónde no debe usarse. Futuro: multi-etiqueta, más normas del Caribe y el LLM como segunda opinión en la revisión. Repositorio y aplicación en los QR. Gracias.</a:t>
             </a:r>
             <a:endParaRPr lang="en-US" dirty="0"/>
           </a:p>
@@ -7599,7 +7599,7 @@
                 <a:gridCol w="822960"/>
                 <a:gridCol w="822960"/>
               </a:tblGrid>
-              <a:tr h="384048">
+              <a:tr h="347472">
                 <a:tc>
                   <a:txBody>
                     <a:bodyPr/>
@@ -7609,7 +7609,7 @@
                         <a:buNone/>
                       </a:pPr>
                       <a:r>
-                        <a:rPr lang="en-US" sz="1100" b="1" dirty="0">
+                        <a:rPr lang="en-US" sz="1050" b="1" dirty="0">
                           <a:solidFill>
                             <a:srgbClr val="FFFFFF"/>
                           </a:solidFill>
@@ -7619,14 +7619,14 @@
                         </a:rPr>
                         <a:t>Rama</a:t>
                       </a:r>
-                      <a:endParaRPr lang="en-US" sz="1100" dirty="0">
+                      <a:endParaRPr lang="en-US" sz="1050" dirty="0">
                         <a:latin typeface="Calibri" charset="0"/>
                         <a:ea typeface="Calibri" charset="0"/>
                         <a:cs typeface="Calibri" charset="0"/>
                       </a:endParaRPr>
                     </a:p>
                   </a:txBody>
-                  <a:tcPr marL="54864" marR="54864" marT="54864" marB="54864" anchor="ctr">
+                  <a:tcPr marL="45720" marR="45720" marT="45720" marB="45720" anchor="ctr">
                     <a:lnL w="6350" cap="flat" cmpd="sng" algn="ctr">
                       <a:solidFill>
                         <a:srgbClr val="DDD6D0"/>
@@ -7677,7 +7677,7 @@
                         <a:buNone/>
                       </a:pPr>
                       <a:r>
-                        <a:rPr lang="en-US" sz="1100" b="1" dirty="0">
+                        <a:rPr lang="en-US" sz="1050" b="1" dirty="0">
                           <a:solidFill>
                             <a:srgbClr val="FFFFFF"/>
                           </a:solidFill>
@@ -7687,14 +7687,14 @@
                         </a:rPr>
                         <a:t>Exactitud [IC95]</a:t>
                       </a:r>
-                      <a:endParaRPr lang="en-US" sz="1100" dirty="0">
+                      <a:endParaRPr lang="en-US" sz="1050" dirty="0">
                         <a:latin typeface="Calibri" charset="0"/>
                         <a:ea typeface="Calibri" charset="0"/>
                         <a:cs typeface="Calibri" charset="0"/>
                       </a:endParaRPr>
                     </a:p>
                   </a:txBody>
-                  <a:tcPr marL="54864" marR="54864" marT="54864" marB="54864" anchor="ctr">
+                  <a:tcPr marL="45720" marR="45720" marT="45720" marB="45720" anchor="ctr">
                     <a:lnL w="6350" cap="flat" cmpd="sng" algn="ctr">
                       <a:solidFill>
                         <a:srgbClr val="DDD6D0"/>
@@ -7745,7 +7745,7 @@
                         <a:buNone/>
                       </a:pPr>
                       <a:r>
-                        <a:rPr lang="en-US" sz="1100" b="1" dirty="0">
+                        <a:rPr lang="en-US" sz="1050" b="1" dirty="0">
                           <a:solidFill>
                             <a:srgbClr val="FFFFFF"/>
                           </a:solidFill>
@@ -7755,14 +7755,14 @@
                         </a:rPr>
                         <a:t>F1 macro [IC95]</a:t>
                       </a:r>
-                      <a:endParaRPr lang="en-US" sz="1100" dirty="0">
+                      <a:endParaRPr lang="en-US" sz="1050" dirty="0">
                         <a:latin typeface="Calibri" charset="0"/>
                         <a:ea typeface="Calibri" charset="0"/>
                         <a:cs typeface="Calibri" charset="0"/>
                       </a:endParaRPr>
                     </a:p>
                   </a:txBody>
-                  <a:tcPr marL="54864" marR="54864" marT="54864" marB="54864" anchor="ctr">
+                  <a:tcPr marL="45720" marR="45720" marT="45720" marB="45720" anchor="ctr">
                     <a:lnL w="6350" cap="flat" cmpd="sng" algn="ctr">
                       <a:solidFill>
                         <a:srgbClr val="DDD6D0"/>
@@ -7813,7 +7813,7 @@
                         <a:buNone/>
                       </a:pPr>
                       <a:r>
-                        <a:rPr lang="en-US" sz="1100" b="1" dirty="0">
+                        <a:rPr lang="en-US" sz="1050" b="1" dirty="0">
                           <a:solidFill>
                             <a:srgbClr val="FFFFFF"/>
                           </a:solidFill>
@@ -7823,14 +7823,14 @@
                         </a:rPr>
                         <a:t>Top-2</a:t>
                       </a:r>
-                      <a:endParaRPr lang="en-US" sz="1100" dirty="0">
+                      <a:endParaRPr lang="en-US" sz="1050" dirty="0">
                         <a:latin typeface="Calibri" charset="0"/>
                         <a:ea typeface="Calibri" charset="0"/>
                         <a:cs typeface="Calibri" charset="0"/>
                       </a:endParaRPr>
                     </a:p>
                   </a:txBody>
-                  <a:tcPr marL="54864" marR="54864" marT="54864" marB="54864" anchor="ctr">
+                  <a:tcPr marL="45720" marR="45720" marT="45720" marB="45720" anchor="ctr">
                     <a:lnL w="6350" cap="flat" cmpd="sng" algn="ctr">
                       <a:solidFill>
                         <a:srgbClr val="DDD6D0"/>
@@ -7881,7 +7881,7 @@
                         <a:buNone/>
                       </a:pPr>
                       <a:r>
-                        <a:rPr lang="en-US" sz="1100" b="1" dirty="0">
+                        <a:rPr lang="en-US" sz="1050" b="1" dirty="0">
                           <a:solidFill>
                             <a:srgbClr val="FFFFFF"/>
                           </a:solidFill>
@@ -7891,14 +7891,14 @@
                         </a:rPr>
                         <a:t>κ</a:t>
                       </a:r>
-                      <a:endParaRPr lang="en-US" sz="1100" dirty="0">
+                      <a:endParaRPr lang="en-US" sz="1050" dirty="0">
                         <a:latin typeface="Calibri" charset="0"/>
                         <a:ea typeface="Calibri" charset="0"/>
                         <a:cs typeface="Calibri" charset="0"/>
                       </a:endParaRPr>
                     </a:p>
                   </a:txBody>
-                  <a:tcPr marL="54864" marR="54864" marT="54864" marB="54864" anchor="ctr">
+                  <a:tcPr marL="45720" marR="45720" marT="45720" marB="45720" anchor="ctr">
                     <a:lnL w="6350" cap="flat" cmpd="sng" algn="ctr">
                       <a:solidFill>
                         <a:srgbClr val="DDD6D0"/>
@@ -7941,7 +7941,7 @@
                   </a:tcPr>
                 </a:tc>
               </a:tr>
-              <a:tr h="384048">
+              <a:tr h="347472">
                 <a:tc>
                   <a:txBody>
                     <a:bodyPr/>
@@ -7951,7 +7951,7 @@
                         <a:buNone/>
                       </a:pPr>
                       <a:r>
-                        <a:rPr lang="en-US" sz="1100" dirty="0">
+                        <a:rPr lang="en-US" sz="1050" dirty="0">
                           <a:solidFill>
                             <a:srgbClr val="1B1A19"/>
                           </a:solidFill>
@@ -7961,14 +7961,14 @@
                         </a:rPr>
                         <a:t>Clase mayoritaria</a:t>
                       </a:r>
-                      <a:endParaRPr lang="en-US" sz="1100" dirty="0">
+                      <a:endParaRPr lang="en-US" sz="1050" dirty="0">
                         <a:latin typeface="Calibri" charset="0"/>
                         <a:ea typeface="Calibri" charset="0"/>
                         <a:cs typeface="Calibri" charset="0"/>
                       </a:endParaRPr>
                     </a:p>
                   </a:txBody>
-                  <a:tcPr marL="54864" marR="54864" marT="54864" marB="54864" anchor="ctr">
+                  <a:tcPr marL="45720" marR="45720" marT="45720" marB="45720" anchor="ctr">
                     <a:lnL w="6350" cap="flat" cmpd="sng" algn="ctr">
                       <a:solidFill>
                         <a:srgbClr val="DDD6D0"/>
@@ -8016,7 +8016,7 @@
                         <a:buNone/>
                       </a:pPr>
                       <a:r>
-                        <a:rPr lang="en-US" sz="1100" dirty="0">
+                        <a:rPr lang="en-US" sz="1050" dirty="0">
                           <a:solidFill>
                             <a:srgbClr val="1B1A19"/>
                           </a:solidFill>
@@ -8026,14 +8026,14 @@
                         </a:rPr>
                         <a:t>0.360 [0.281, 0.447]</a:t>
                       </a:r>
-                      <a:endParaRPr lang="en-US" sz="1100" dirty="0">
+                      <a:endParaRPr lang="en-US" sz="1050" dirty="0">
                         <a:latin typeface="Calibri" charset="0"/>
                         <a:ea typeface="Calibri" charset="0"/>
                         <a:cs typeface="Calibri" charset="0"/>
                       </a:endParaRPr>
                     </a:p>
                   </a:txBody>
-                  <a:tcPr marL="54864" marR="54864" marT="54864" marB="54864" anchor="ctr">
+                  <a:tcPr marL="45720" marR="45720" marT="45720" marB="45720" anchor="ctr">
                     <a:lnL w="6350" cap="flat" cmpd="sng" algn="ctr">
                       <a:solidFill>
                         <a:srgbClr val="DDD6D0"/>
@@ -8081,7 +8081,7 @@
                         <a:buNone/>
                       </a:pPr>
                       <a:r>
-                        <a:rPr lang="en-US" sz="1100" dirty="0">
+                        <a:rPr lang="en-US" sz="1050" dirty="0">
                           <a:solidFill>
                             <a:srgbClr val="1B1A19"/>
                           </a:solidFill>
@@ -8091,14 +8091,14 @@
                         </a:rPr>
                         <a:t>0.106</a:t>
                       </a:r>
-                      <a:endParaRPr lang="en-US" sz="1100" dirty="0">
+                      <a:endParaRPr lang="en-US" sz="1050" dirty="0">
                         <a:latin typeface="Calibri" charset="0"/>
                         <a:ea typeface="Calibri" charset="0"/>
                         <a:cs typeface="Calibri" charset="0"/>
                       </a:endParaRPr>
                     </a:p>
                   </a:txBody>
-                  <a:tcPr marL="54864" marR="54864" marT="54864" marB="54864" anchor="ctr">
+                  <a:tcPr marL="45720" marR="45720" marT="45720" marB="45720" anchor="ctr">
                     <a:lnL w="6350" cap="flat" cmpd="sng" algn="ctr">
                       <a:solidFill>
                         <a:srgbClr val="DDD6D0"/>
@@ -8146,7 +8146,7 @@
                         <a:buNone/>
                       </a:pPr>
                       <a:r>
-                        <a:rPr lang="en-US" sz="1100" dirty="0">
+                        <a:rPr lang="en-US" sz="1050" dirty="0">
                           <a:solidFill>
                             <a:srgbClr val="1B1A19"/>
                           </a:solidFill>
@@ -8156,14 +8156,14 @@
                         </a:rPr>
                         <a:t>0.360</a:t>
                       </a:r>
-                      <a:endParaRPr lang="en-US" sz="1100" dirty="0">
+                      <a:endParaRPr lang="en-US" sz="1050" dirty="0">
                         <a:latin typeface="Calibri" charset="0"/>
                         <a:ea typeface="Calibri" charset="0"/>
                         <a:cs typeface="Calibri" charset="0"/>
                       </a:endParaRPr>
                     </a:p>
                   </a:txBody>
-                  <a:tcPr marL="54864" marR="54864" marT="54864" marB="54864" anchor="ctr">
+                  <a:tcPr marL="45720" marR="45720" marT="45720" marB="45720" anchor="ctr">
                     <a:lnL w="6350" cap="flat" cmpd="sng" algn="ctr">
                       <a:solidFill>
                         <a:srgbClr val="DDD6D0"/>
@@ -8211,7 +8211,7 @@
                         <a:buNone/>
                       </a:pPr>
                       <a:r>
-                        <a:rPr lang="en-US" sz="1100" dirty="0">
+                        <a:rPr lang="en-US" sz="1050" dirty="0">
                           <a:solidFill>
                             <a:srgbClr val="1B1A19"/>
                           </a:solidFill>
@@ -8221,14 +8221,14 @@
                         </a:rPr>
                         <a:t>0.00</a:t>
                       </a:r>
-                      <a:endParaRPr lang="en-US" sz="1100" dirty="0">
+                      <a:endParaRPr lang="en-US" sz="1050" dirty="0">
                         <a:latin typeface="Calibri" charset="0"/>
                         <a:ea typeface="Calibri" charset="0"/>
                         <a:cs typeface="Calibri" charset="0"/>
                       </a:endParaRPr>
                     </a:p>
                   </a:txBody>
-                  <a:tcPr marL="54864" marR="54864" marT="54864" marB="54864" anchor="ctr">
+                  <a:tcPr marL="45720" marR="45720" marT="45720" marB="45720" anchor="ctr">
                     <a:lnL w="6350" cap="flat" cmpd="sng" algn="ctr">
                       <a:solidFill>
                         <a:srgbClr val="DDD6D0"/>
@@ -8268,7 +8268,7 @@
                   </a:tcPr>
                 </a:tc>
               </a:tr>
-              <a:tr h="384048">
+              <a:tr h="347472">
                 <a:tc>
                   <a:txBody>
                     <a:bodyPr/>
@@ -8278,7 +8278,7 @@
                         <a:buNone/>
                       </a:pPr>
                       <a:r>
-                        <a:rPr lang="en-US" sz="1100" dirty="0">
+                        <a:rPr lang="en-US" sz="1050" dirty="0">
                           <a:solidFill>
                             <a:srgbClr val="1B1A19"/>
                           </a:solidFill>
@@ -8288,14 +8288,14 @@
                         </a:rPr>
                         <a:t>Metadatos (tipo de norma)</a:t>
                       </a:r>
-                      <a:endParaRPr lang="en-US" sz="1100" dirty="0">
+                      <a:endParaRPr lang="en-US" sz="1050" dirty="0">
                         <a:latin typeface="Calibri" charset="0"/>
                         <a:ea typeface="Calibri" charset="0"/>
                         <a:cs typeface="Calibri" charset="0"/>
                       </a:endParaRPr>
                     </a:p>
                   </a:txBody>
-                  <a:tcPr marL="54864" marR="54864" marT="54864" marB="54864" anchor="ctr">
+                  <a:tcPr marL="45720" marR="45720" marT="45720" marB="45720" anchor="ctr">
                     <a:lnL w="6350" cap="flat" cmpd="sng" algn="ctr">
                       <a:solidFill>
                         <a:srgbClr val="DDD6D0"/>
@@ -8343,7 +8343,7 @@
                         <a:buNone/>
                       </a:pPr>
                       <a:r>
-                        <a:rPr lang="en-US" sz="1100" dirty="0">
+                        <a:rPr lang="en-US" sz="1050" dirty="0">
                           <a:solidFill>
                             <a:srgbClr val="1B1A19"/>
                           </a:solidFill>
@@ -8353,14 +8353,14 @@
                         </a:rPr>
                         <a:t>0.544 [0.457, 0.629]</a:t>
                       </a:r>
-                      <a:endParaRPr lang="en-US" sz="1100" dirty="0">
+                      <a:endParaRPr lang="en-US" sz="1050" dirty="0">
                         <a:latin typeface="Calibri" charset="0"/>
                         <a:ea typeface="Calibri" charset="0"/>
                         <a:cs typeface="Calibri" charset="0"/>
                       </a:endParaRPr>
                     </a:p>
                   </a:txBody>
-                  <a:tcPr marL="54864" marR="54864" marT="54864" marB="54864" anchor="ctr">
+                  <a:tcPr marL="45720" marR="45720" marT="45720" marB="45720" anchor="ctr">
                     <a:lnL w="6350" cap="flat" cmpd="sng" algn="ctr">
                       <a:solidFill>
                         <a:srgbClr val="DDD6D0"/>
@@ -8408,7 +8408,7 @@
                         <a:buNone/>
                       </a:pPr>
                       <a:r>
-                        <a:rPr lang="en-US" sz="1100" dirty="0">
+                        <a:rPr lang="en-US" sz="1050" dirty="0">
                           <a:solidFill>
                             <a:srgbClr val="1B1A19"/>
                           </a:solidFill>
@@ -8418,14 +8418,14 @@
                         </a:rPr>
                         <a:t>0.322</a:t>
                       </a:r>
-                      <a:endParaRPr lang="en-US" sz="1100" dirty="0">
+                      <a:endParaRPr lang="en-US" sz="1050" dirty="0">
                         <a:latin typeface="Calibri" charset="0"/>
                         <a:ea typeface="Calibri" charset="0"/>
                         <a:cs typeface="Calibri" charset="0"/>
                       </a:endParaRPr>
                     </a:p>
                   </a:txBody>
-                  <a:tcPr marL="54864" marR="54864" marT="54864" marB="54864" anchor="ctr">
+                  <a:tcPr marL="45720" marR="45720" marT="45720" marB="45720" anchor="ctr">
                     <a:lnL w="6350" cap="flat" cmpd="sng" algn="ctr">
                       <a:solidFill>
                         <a:srgbClr val="DDD6D0"/>
@@ -8473,7 +8473,7 @@
                         <a:buNone/>
                       </a:pPr>
                       <a:r>
-                        <a:rPr lang="en-US" sz="1100" dirty="0">
+                        <a:rPr lang="en-US" sz="1050" dirty="0">
                           <a:solidFill>
                             <a:srgbClr val="1B1A19"/>
                           </a:solidFill>
@@ -8483,14 +8483,14 @@
                         </a:rPr>
                         <a:t>0.608</a:t>
                       </a:r>
-                      <a:endParaRPr lang="en-US" sz="1100" dirty="0">
+                      <a:endParaRPr lang="en-US" sz="1050" dirty="0">
                         <a:latin typeface="Calibri" charset="0"/>
                         <a:ea typeface="Calibri" charset="0"/>
                         <a:cs typeface="Calibri" charset="0"/>
                       </a:endParaRPr>
                     </a:p>
                   </a:txBody>
-                  <a:tcPr marL="54864" marR="54864" marT="54864" marB="54864" anchor="ctr">
+                  <a:tcPr marL="45720" marR="45720" marT="45720" marB="45720" anchor="ctr">
                     <a:lnL w="6350" cap="flat" cmpd="sng" algn="ctr">
                       <a:solidFill>
                         <a:srgbClr val="DDD6D0"/>
@@ -8538,7 +8538,7 @@
                         <a:buNone/>
                       </a:pPr>
                       <a:r>
-                        <a:rPr lang="en-US" sz="1100" dirty="0">
+                        <a:rPr lang="en-US" sz="1050" dirty="0">
                           <a:solidFill>
                             <a:srgbClr val="1B1A19"/>
                           </a:solidFill>
@@ -8548,14 +8548,14 @@
                         </a:rPr>
                         <a:t>0.32</a:t>
                       </a:r>
-                      <a:endParaRPr lang="en-US" sz="1100" dirty="0">
+                      <a:endParaRPr lang="en-US" sz="1050" dirty="0">
                         <a:latin typeface="Calibri" charset="0"/>
                         <a:ea typeface="Calibri" charset="0"/>
                         <a:cs typeface="Calibri" charset="0"/>
                       </a:endParaRPr>
                     </a:p>
                   </a:txBody>
-                  <a:tcPr marL="54864" marR="54864" marT="54864" marB="54864" anchor="ctr">
+                  <a:tcPr marL="45720" marR="45720" marT="45720" marB="45720" anchor="ctr">
                     <a:lnL w="6350" cap="flat" cmpd="sng" algn="ctr">
                       <a:solidFill>
                         <a:srgbClr val="DDD6D0"/>
@@ -8595,7 +8595,7 @@
                   </a:tcPr>
                 </a:tc>
               </a:tr>
-              <a:tr h="384048">
+              <a:tr h="347472">
                 <a:tc>
                   <a:txBody>
                     <a:bodyPr/>
@@ -8605,7 +8605,7 @@
                         <a:buNone/>
                       </a:pPr>
                       <a:r>
-                        <a:rPr lang="en-US" sz="1100" dirty="0">
+                        <a:rPr lang="en-US" sz="1050" dirty="0">
                           <a:solidFill>
                             <a:srgbClr val="1B1A19"/>
                           </a:solidFill>
@@ -8615,14 +8615,14 @@
                         </a:rPr>
                         <a:t>model_v1 (base)</a:t>
                       </a:r>
-                      <a:endParaRPr lang="en-US" sz="1100" dirty="0">
+                      <a:endParaRPr lang="en-US" sz="1050" dirty="0">
                         <a:latin typeface="Calibri" charset="0"/>
                         <a:ea typeface="Calibri" charset="0"/>
                         <a:cs typeface="Calibri" charset="0"/>
                       </a:endParaRPr>
                     </a:p>
                   </a:txBody>
-                  <a:tcPr marL="54864" marR="54864" marT="54864" marB="54864" anchor="ctr">
+                  <a:tcPr marL="45720" marR="45720" marT="45720" marB="45720" anchor="ctr">
                     <a:lnL w="6350" cap="flat" cmpd="sng" algn="ctr">
                       <a:solidFill>
                         <a:srgbClr val="DDD6D0"/>
@@ -8670,7 +8670,7 @@
                         <a:buNone/>
                       </a:pPr>
                       <a:r>
-                        <a:rPr lang="en-US" sz="1100" dirty="0">
+                        <a:rPr lang="en-US" sz="1050" dirty="0">
                           <a:solidFill>
                             <a:srgbClr val="1B1A19"/>
                           </a:solidFill>
@@ -8680,14 +8680,14 @@
                         </a:rPr>
                         <a:t>0.688 [0.602, 0.763]</a:t>
                       </a:r>
-                      <a:endParaRPr lang="en-US" sz="1100" dirty="0">
+                      <a:endParaRPr lang="en-US" sz="1050" dirty="0">
                         <a:latin typeface="Calibri" charset="0"/>
                         <a:ea typeface="Calibri" charset="0"/>
                         <a:cs typeface="Calibri" charset="0"/>
                       </a:endParaRPr>
                     </a:p>
                   </a:txBody>
-                  <a:tcPr marL="54864" marR="54864" marT="54864" marB="54864" anchor="ctr">
+                  <a:tcPr marL="45720" marR="45720" marT="45720" marB="45720" anchor="ctr">
                     <a:lnL w="6350" cap="flat" cmpd="sng" algn="ctr">
                       <a:solidFill>
                         <a:srgbClr val="DDD6D0"/>
@@ -8735,7 +8735,7 @@
                         <a:buNone/>
                       </a:pPr>
                       <a:r>
-                        <a:rPr lang="en-US" sz="1100" dirty="0">
+                        <a:rPr lang="en-US" sz="1050" dirty="0">
                           <a:solidFill>
                             <a:srgbClr val="1B1A19"/>
                           </a:solidFill>
@@ -8745,14 +8745,14 @@
                         </a:rPr>
                         <a:t>0.617 [0.505, 0.712]</a:t>
                       </a:r>
-                      <a:endParaRPr lang="en-US" sz="1100" dirty="0">
+                      <a:endParaRPr lang="en-US" sz="1050" dirty="0">
                         <a:latin typeface="Calibri" charset="0"/>
                         <a:ea typeface="Calibri" charset="0"/>
                         <a:cs typeface="Calibri" charset="0"/>
                       </a:endParaRPr>
                     </a:p>
                   </a:txBody>
-                  <a:tcPr marL="54864" marR="54864" marT="54864" marB="54864" anchor="ctr">
+                  <a:tcPr marL="45720" marR="45720" marT="45720" marB="45720" anchor="ctr">
                     <a:lnL w="6350" cap="flat" cmpd="sng" algn="ctr">
                       <a:solidFill>
                         <a:srgbClr val="DDD6D0"/>
@@ -8800,7 +8800,7 @@
                         <a:buNone/>
                       </a:pPr>
                       <a:r>
-                        <a:rPr lang="en-US" sz="1100" dirty="0">
+                        <a:rPr lang="en-US" sz="1050" dirty="0">
                           <a:solidFill>
                             <a:srgbClr val="1B1A19"/>
                           </a:solidFill>
@@ -8810,14 +8810,14 @@
                         </a:rPr>
                         <a:t>0.872</a:t>
                       </a:r>
-                      <a:endParaRPr lang="en-US" sz="1100" dirty="0">
+                      <a:endParaRPr lang="en-US" sz="1050" dirty="0">
                         <a:latin typeface="Calibri" charset="0"/>
                         <a:ea typeface="Calibri" charset="0"/>
                         <a:cs typeface="Calibri" charset="0"/>
                       </a:endParaRPr>
                     </a:p>
                   </a:txBody>
-                  <a:tcPr marL="54864" marR="54864" marT="54864" marB="54864" anchor="ctr">
+                  <a:tcPr marL="45720" marR="45720" marT="45720" marB="45720" anchor="ctr">
                     <a:lnL w="6350" cap="flat" cmpd="sng" algn="ctr">
                       <a:solidFill>
                         <a:srgbClr val="DDD6D0"/>
@@ -8865,7 +8865,7 @@
                         <a:buNone/>
                       </a:pPr>
                       <a:r>
-                        <a:rPr lang="en-US" sz="1100" dirty="0">
+                        <a:rPr lang="en-US" sz="1050" dirty="0">
                           <a:solidFill>
                             <a:srgbClr val="1B1A19"/>
                           </a:solidFill>
@@ -8875,14 +8875,14 @@
                         </a:rPr>
                         <a:t>0.56</a:t>
                       </a:r>
-                      <a:endParaRPr lang="en-US" sz="1100" dirty="0">
+                      <a:endParaRPr lang="en-US" sz="1050" dirty="0">
                         <a:latin typeface="Calibri" charset="0"/>
                         <a:ea typeface="Calibri" charset="0"/>
                         <a:cs typeface="Calibri" charset="0"/>
                       </a:endParaRPr>
                     </a:p>
                   </a:txBody>
-                  <a:tcPr marL="54864" marR="54864" marT="54864" marB="54864" anchor="ctr">
+                  <a:tcPr marL="45720" marR="45720" marT="45720" marB="45720" anchor="ctr">
                     <a:lnL w="6350" cap="flat" cmpd="sng" algn="ctr">
                       <a:solidFill>
                         <a:srgbClr val="DDD6D0"/>
@@ -8922,7 +8922,7 @@
                   </a:tcPr>
                 </a:tc>
               </a:tr>
-              <a:tr h="384048">
+              <a:tr h="347472">
                 <a:tc>
                   <a:txBody>
                     <a:bodyPr/>
@@ -8932,7 +8932,7 @@
                         <a:buNone/>
                       </a:pPr>
                       <a:r>
-                        <a:rPr lang="en-US" sz="1100" b="1" dirty="0">
+                        <a:rPr lang="en-US" sz="1050" b="1" dirty="0">
                           <a:solidFill>
                             <a:srgbClr val="1B1A19"/>
                           </a:solidFill>
@@ -8942,14 +8942,14 @@
                         </a:rPr>
                         <a:t>best_model (regla 1-DE)</a:t>
                       </a:r>
-                      <a:endParaRPr lang="en-US" sz="1100" dirty="0">
+                      <a:endParaRPr lang="en-US" sz="1050" dirty="0">
                         <a:latin typeface="Calibri" charset="0"/>
                         <a:ea typeface="Calibri" charset="0"/>
                         <a:cs typeface="Calibri" charset="0"/>
                       </a:endParaRPr>
                     </a:p>
                   </a:txBody>
-                  <a:tcPr marL="54864" marR="54864" marT="54864" marB="54864" anchor="ctr">
+                  <a:tcPr marL="45720" marR="45720" marT="45720" marB="45720" anchor="ctr">
                     <a:lnL w="6350" cap="flat" cmpd="sng" algn="ctr">
                       <a:solidFill>
                         <a:srgbClr val="DDD6D0"/>
@@ -9000,7 +9000,7 @@
                         <a:buNone/>
                       </a:pPr>
                       <a:r>
-                        <a:rPr lang="en-US" sz="1100" dirty="0">
+                        <a:rPr lang="en-US" sz="1050" dirty="0">
                           <a:solidFill>
                             <a:srgbClr val="1B1A19"/>
                           </a:solidFill>
@@ -9010,14 +9010,14 @@
                         </a:rPr>
                         <a:t>0.672 [0.586, 0.748]</a:t>
                       </a:r>
-                      <a:endParaRPr lang="en-US" sz="1100" dirty="0">
+                      <a:endParaRPr lang="en-US" sz="1050" dirty="0">
                         <a:latin typeface="Calibri" charset="0"/>
                         <a:ea typeface="Calibri" charset="0"/>
                         <a:cs typeface="Calibri" charset="0"/>
                       </a:endParaRPr>
                     </a:p>
                   </a:txBody>
-                  <a:tcPr marL="54864" marR="54864" marT="54864" marB="54864" anchor="ctr">
+                  <a:tcPr marL="45720" marR="45720" marT="45720" marB="45720" anchor="ctr">
                     <a:lnL w="6350" cap="flat" cmpd="sng" algn="ctr">
                       <a:solidFill>
                         <a:srgbClr val="DDD6D0"/>
@@ -9068,7 +9068,7 @@
                         <a:buNone/>
                       </a:pPr>
                       <a:r>
-                        <a:rPr lang="en-US" sz="1100" b="1" dirty="0">
+                        <a:rPr lang="en-US" sz="1050" b="1" dirty="0">
                           <a:solidFill>
                             <a:srgbClr val="1B1A19"/>
                           </a:solidFill>
@@ -9078,14 +9078,14 @@
                         </a:rPr>
                         <a:t>0.631 [0.530, 0.724]</a:t>
                       </a:r>
-                      <a:endParaRPr lang="en-US" sz="1100" dirty="0">
+                      <a:endParaRPr lang="en-US" sz="1050" dirty="0">
                         <a:latin typeface="Calibri" charset="0"/>
                         <a:ea typeface="Calibri" charset="0"/>
                         <a:cs typeface="Calibri" charset="0"/>
                       </a:endParaRPr>
                     </a:p>
                   </a:txBody>
-                  <a:tcPr marL="54864" marR="54864" marT="54864" marB="54864" anchor="ctr">
+                  <a:tcPr marL="45720" marR="45720" marT="45720" marB="45720" anchor="ctr">
                     <a:lnL w="6350" cap="flat" cmpd="sng" algn="ctr">
                       <a:solidFill>
                         <a:srgbClr val="DDD6D0"/>
@@ -9136,7 +9136,7 @@
                         <a:buNone/>
                       </a:pPr>
                       <a:r>
-                        <a:rPr lang="en-US" sz="1100" dirty="0">
+                        <a:rPr lang="en-US" sz="1050" dirty="0">
                           <a:solidFill>
                             <a:srgbClr val="1B1A19"/>
                           </a:solidFill>
@@ -9146,14 +9146,14 @@
                         </a:rPr>
                         <a:t>0.864</a:t>
                       </a:r>
-                      <a:endParaRPr lang="en-US" sz="1100" dirty="0">
+                      <a:endParaRPr lang="en-US" sz="1050" dirty="0">
                         <a:latin typeface="Calibri" charset="0"/>
                         <a:ea typeface="Calibri" charset="0"/>
                         <a:cs typeface="Calibri" charset="0"/>
                       </a:endParaRPr>
                     </a:p>
                   </a:txBody>
-                  <a:tcPr marL="54864" marR="54864" marT="54864" marB="54864" anchor="ctr">
+                  <a:tcPr marL="45720" marR="45720" marT="45720" marB="45720" anchor="ctr">
                     <a:lnL w="6350" cap="flat" cmpd="sng" algn="ctr">
                       <a:solidFill>
                         <a:srgbClr val="DDD6D0"/>
@@ -9204,7 +9204,7 @@
                         <a:buNone/>
                       </a:pPr>
                       <a:r>
-                        <a:rPr lang="en-US" sz="1100" dirty="0">
+                        <a:rPr lang="en-US" sz="1050" dirty="0">
                           <a:solidFill>
                             <a:srgbClr val="1B1A19"/>
                           </a:solidFill>
@@ -9214,14 +9214,14 @@
                         </a:rPr>
                         <a:t>0.54</a:t>
                       </a:r>
-                      <a:endParaRPr lang="en-US" sz="1100" dirty="0">
+                      <a:endParaRPr lang="en-US" sz="1050" dirty="0">
                         <a:latin typeface="Calibri" charset="0"/>
                         <a:ea typeface="Calibri" charset="0"/>
                         <a:cs typeface="Calibri" charset="0"/>
                       </a:endParaRPr>
                     </a:p>
                   </a:txBody>
-                  <a:tcPr marL="54864" marR="54864" marT="54864" marB="54864" anchor="ctr">
+                  <a:tcPr marL="45720" marR="45720" marT="45720" marB="45720" anchor="ctr">
                     <a:lnL w="6350" cap="flat" cmpd="sng" algn="ctr">
                       <a:solidFill>
                         <a:srgbClr val="DDD6D0"/>
@@ -9264,6 +9264,333 @@
                   </a:tcPr>
                 </a:tc>
               </a:tr>
+              <a:tr h="347472">
+                <a:tc>
+                  <a:txBody>
+                    <a:bodyPr/>
+                    <a:lstStyle/>
+                    <a:p>
+                      <a:pPr indent="0" marL="0">
+                        <a:buNone/>
+                      </a:pPr>
+                      <a:r>
+                        <a:rPr lang="en-US" sz="1050" dirty="0">
+                          <a:solidFill>
+                            <a:srgbClr val="1B1A19"/>
+                          </a:solidFill>
+                          <a:latin typeface="Calibri" pitchFamily="34" charset="0"/>
+                          <a:ea typeface="Calibri" pitchFamily="34" charset="-122"/>
+                          <a:cs typeface="Calibri" pitchFamily="34" charset="-120"/>
+                        </a:rPr>
+                        <a:t>LLM few-shot (Claude Sonnet 5.5, 15 ej.)</a:t>
+                      </a:r>
+                      <a:endParaRPr lang="en-US" sz="1050" dirty="0">
+                        <a:latin typeface="Calibri" charset="0"/>
+                        <a:ea typeface="Calibri" charset="0"/>
+                        <a:cs typeface="Calibri" charset="0"/>
+                      </a:endParaRPr>
+                    </a:p>
+                  </a:txBody>
+                  <a:tcPr marL="45720" marR="45720" marT="45720" marB="45720" anchor="ctr">
+                    <a:lnL w="6350" cap="flat" cmpd="sng" algn="ctr">
+                      <a:solidFill>
+                        <a:srgbClr val="DDD6D0"/>
+                      </a:solidFill>
+                      <a:prstDash val="solid"/>
+                      <a:round/>
+                      <a:headEnd type="none" w="med" len="med"/>
+                      <a:tailEnd type="none" w="med" len="med"/>
+                    </a:lnL>
+                    <a:lnR w="6350" cap="flat" cmpd="sng" algn="ctr">
+                      <a:solidFill>
+                        <a:srgbClr val="DDD6D0"/>
+                      </a:solidFill>
+                      <a:prstDash val="solid"/>
+                      <a:round/>
+                      <a:headEnd type="none" w="med" len="med"/>
+                      <a:tailEnd type="none" w="med" len="med"/>
+                    </a:lnR>
+                    <a:lnT w="6350" cap="flat" cmpd="sng" algn="ctr">
+                      <a:solidFill>
+                        <a:srgbClr val="DDD6D0"/>
+                      </a:solidFill>
+                      <a:prstDash val="solid"/>
+                      <a:round/>
+                      <a:headEnd type="none" w="med" len="med"/>
+                      <a:tailEnd type="none" w="med" len="med"/>
+                    </a:lnT>
+                    <a:lnB w="6350" cap="flat" cmpd="sng" algn="ctr">
+                      <a:solidFill>
+                        <a:srgbClr val="DDD6D0"/>
+                      </a:solidFill>
+                      <a:prstDash val="solid"/>
+                      <a:round/>
+                      <a:headEnd type="none" w="med" len="med"/>
+                      <a:tailEnd type="none" w="med" len="med"/>
+                    </a:lnB>
+                  </a:tcPr>
+                </a:tc>
+                <a:tc>
+                  <a:txBody>
+                    <a:bodyPr/>
+                    <a:lstStyle/>
+                    <a:p>
+                      <a:pPr indent="0" marL="0">
+                        <a:buNone/>
+                      </a:pPr>
+                      <a:r>
+                        <a:rPr lang="en-US" sz="1050" dirty="0">
+                          <a:solidFill>
+                            <a:srgbClr val="1B1A19"/>
+                          </a:solidFill>
+                          <a:latin typeface="Calibri" pitchFamily="34" charset="0"/>
+                          <a:ea typeface="Calibri" pitchFamily="34" charset="-122"/>
+                          <a:cs typeface="Calibri" pitchFamily="34" charset="-120"/>
+                        </a:rPr>
+                        <a:t>0.640 [0.553, 0.719]</a:t>
+                      </a:r>
+                      <a:endParaRPr lang="en-US" sz="1050" dirty="0">
+                        <a:latin typeface="Calibri" charset="0"/>
+                        <a:ea typeface="Calibri" charset="0"/>
+                        <a:cs typeface="Calibri" charset="0"/>
+                      </a:endParaRPr>
+                    </a:p>
+                  </a:txBody>
+                  <a:tcPr marL="45720" marR="45720" marT="45720" marB="45720" anchor="ctr">
+                    <a:lnL w="6350" cap="flat" cmpd="sng" algn="ctr">
+                      <a:solidFill>
+                        <a:srgbClr val="DDD6D0"/>
+                      </a:solidFill>
+                      <a:prstDash val="solid"/>
+                      <a:round/>
+                      <a:headEnd type="none" w="med" len="med"/>
+                      <a:tailEnd type="none" w="med" len="med"/>
+                    </a:lnL>
+                    <a:lnR w="6350" cap="flat" cmpd="sng" algn="ctr">
+                      <a:solidFill>
+                        <a:srgbClr val="DDD6D0"/>
+                      </a:solidFill>
+                      <a:prstDash val="solid"/>
+                      <a:round/>
+                      <a:headEnd type="none" w="med" len="med"/>
+                      <a:tailEnd type="none" w="med" len="med"/>
+                    </a:lnR>
+                    <a:lnT w="6350" cap="flat" cmpd="sng" algn="ctr">
+                      <a:solidFill>
+                        <a:srgbClr val="DDD6D0"/>
+                      </a:solidFill>
+                      <a:prstDash val="solid"/>
+                      <a:round/>
+                      <a:headEnd type="none" w="med" len="med"/>
+                      <a:tailEnd type="none" w="med" len="med"/>
+                    </a:lnT>
+                    <a:lnB w="6350" cap="flat" cmpd="sng" algn="ctr">
+                      <a:solidFill>
+                        <a:srgbClr val="DDD6D0"/>
+                      </a:solidFill>
+                      <a:prstDash val="solid"/>
+                      <a:round/>
+                      <a:headEnd type="none" w="med" len="med"/>
+                      <a:tailEnd type="none" w="med" len="med"/>
+                    </a:lnB>
+                  </a:tcPr>
+                </a:tc>
+                <a:tc>
+                  <a:txBody>
+                    <a:bodyPr/>
+                    <a:lstStyle/>
+                    <a:p>
+                      <a:pPr indent="0" marL="0">
+                        <a:buNone/>
+                      </a:pPr>
+                      <a:r>
+                        <a:rPr lang="en-US" sz="1050" dirty="0">
+                          <a:solidFill>
+                            <a:srgbClr val="1B1A19"/>
+                          </a:solidFill>
+                          <a:latin typeface="Calibri" pitchFamily="34" charset="0"/>
+                          <a:ea typeface="Calibri" pitchFamily="34" charset="-122"/>
+                          <a:cs typeface="Calibri" pitchFamily="34" charset="-120"/>
+                        </a:rPr>
+                        <a:t>0.554 [0.447, 0.648]</a:t>
+                      </a:r>
+                      <a:endParaRPr lang="en-US" sz="1050" dirty="0">
+                        <a:latin typeface="Calibri" charset="0"/>
+                        <a:ea typeface="Calibri" charset="0"/>
+                        <a:cs typeface="Calibri" charset="0"/>
+                      </a:endParaRPr>
+                    </a:p>
+                  </a:txBody>
+                  <a:tcPr marL="45720" marR="45720" marT="45720" marB="45720" anchor="ctr">
+                    <a:lnL w="6350" cap="flat" cmpd="sng" algn="ctr">
+                      <a:solidFill>
+                        <a:srgbClr val="DDD6D0"/>
+                      </a:solidFill>
+                      <a:prstDash val="solid"/>
+                      <a:round/>
+                      <a:headEnd type="none" w="med" len="med"/>
+                      <a:tailEnd type="none" w="med" len="med"/>
+                    </a:lnL>
+                    <a:lnR w="6350" cap="flat" cmpd="sng" algn="ctr">
+                      <a:solidFill>
+                        <a:srgbClr val="DDD6D0"/>
+                      </a:solidFill>
+                      <a:prstDash val="solid"/>
+                      <a:round/>
+                      <a:headEnd type="none" w="med" len="med"/>
+                      <a:tailEnd type="none" w="med" len="med"/>
+                    </a:lnR>
+                    <a:lnT w="6350" cap="flat" cmpd="sng" algn="ctr">
+                      <a:solidFill>
+                        <a:srgbClr val="DDD6D0"/>
+                      </a:solidFill>
+                      <a:prstDash val="solid"/>
+                      <a:round/>
+                      <a:headEnd type="none" w="med" len="med"/>
+                      <a:tailEnd type="none" w="med" len="med"/>
+                    </a:lnT>
+                    <a:lnB w="6350" cap="flat" cmpd="sng" algn="ctr">
+                      <a:solidFill>
+                        <a:srgbClr val="DDD6D0"/>
+                      </a:solidFill>
+                      <a:prstDash val="solid"/>
+                      <a:round/>
+                      <a:headEnd type="none" w="med" len="med"/>
+                      <a:tailEnd type="none" w="med" len="med"/>
+                    </a:lnB>
+                  </a:tcPr>
+                </a:tc>
+                <a:tc>
+                  <a:txBody>
+                    <a:bodyPr/>
+                    <a:lstStyle/>
+                    <a:p>
+                      <a:pPr indent="0" marL="0">
+                        <a:buNone/>
+                      </a:pPr>
+                      <a:r>
+                        <a:rPr lang="en-US" sz="1050" dirty="0">
+                          <a:solidFill>
+                            <a:srgbClr val="1B1A19"/>
+                          </a:solidFill>
+                          <a:latin typeface="Calibri" pitchFamily="34" charset="0"/>
+                          <a:ea typeface="Calibri" pitchFamily="34" charset="-122"/>
+                          <a:cs typeface="Calibri" pitchFamily="34" charset="-120"/>
+                        </a:rPr>
+                        <a:t>0.824</a:t>
+                      </a:r>
+                      <a:endParaRPr lang="en-US" sz="1050" dirty="0">
+                        <a:latin typeface="Calibri" charset="0"/>
+                        <a:ea typeface="Calibri" charset="0"/>
+                        <a:cs typeface="Calibri" charset="0"/>
+                      </a:endParaRPr>
+                    </a:p>
+                  </a:txBody>
+                  <a:tcPr marL="45720" marR="45720" marT="45720" marB="45720" anchor="ctr">
+                    <a:lnL w="6350" cap="flat" cmpd="sng" algn="ctr">
+                      <a:solidFill>
+                        <a:srgbClr val="DDD6D0"/>
+                      </a:solidFill>
+                      <a:prstDash val="solid"/>
+                      <a:round/>
+                      <a:headEnd type="none" w="med" len="med"/>
+                      <a:tailEnd type="none" w="med" len="med"/>
+                    </a:lnL>
+                    <a:lnR w="6350" cap="flat" cmpd="sng" algn="ctr">
+                      <a:solidFill>
+                        <a:srgbClr val="DDD6D0"/>
+                      </a:solidFill>
+                      <a:prstDash val="solid"/>
+                      <a:round/>
+                      <a:headEnd type="none" w="med" len="med"/>
+                      <a:tailEnd type="none" w="med" len="med"/>
+                    </a:lnR>
+                    <a:lnT w="6350" cap="flat" cmpd="sng" algn="ctr">
+                      <a:solidFill>
+                        <a:srgbClr val="DDD6D0"/>
+                      </a:solidFill>
+                      <a:prstDash val="solid"/>
+                      <a:round/>
+                      <a:headEnd type="none" w="med" len="med"/>
+                      <a:tailEnd type="none" w="med" len="med"/>
+                    </a:lnT>
+                    <a:lnB w="6350" cap="flat" cmpd="sng" algn="ctr">
+                      <a:solidFill>
+                        <a:srgbClr val="DDD6D0"/>
+                      </a:solidFill>
+                      <a:prstDash val="solid"/>
+                      <a:round/>
+                      <a:headEnd type="none" w="med" len="med"/>
+                      <a:tailEnd type="none" w="med" len="med"/>
+                    </a:lnB>
+                  </a:tcPr>
+                </a:tc>
+                <a:tc>
+                  <a:txBody>
+                    <a:bodyPr/>
+                    <a:lstStyle/>
+                    <a:p>
+                      <a:pPr indent="0" marL="0">
+                        <a:buNone/>
+                      </a:pPr>
+                      <a:r>
+                        <a:rPr lang="en-US" sz="1050" dirty="0">
+                          <a:solidFill>
+                            <a:srgbClr val="1B1A19"/>
+                          </a:solidFill>
+                          <a:latin typeface="Calibri" pitchFamily="34" charset="0"/>
+                          <a:ea typeface="Calibri" pitchFamily="34" charset="-122"/>
+                          <a:cs typeface="Calibri" pitchFamily="34" charset="-120"/>
+                        </a:rPr>
+                        <a:t>0.53</a:t>
+                      </a:r>
+                      <a:endParaRPr lang="en-US" sz="1050" dirty="0">
+                        <a:latin typeface="Calibri" charset="0"/>
+                        <a:ea typeface="Calibri" charset="0"/>
+                        <a:cs typeface="Calibri" charset="0"/>
+                      </a:endParaRPr>
+                    </a:p>
+                  </a:txBody>
+                  <a:tcPr marL="45720" marR="45720" marT="45720" marB="45720" anchor="ctr">
+                    <a:lnL w="6350" cap="flat" cmpd="sng" algn="ctr">
+                      <a:solidFill>
+                        <a:srgbClr val="DDD6D0"/>
+                      </a:solidFill>
+                      <a:prstDash val="solid"/>
+                      <a:round/>
+                      <a:headEnd type="none" w="med" len="med"/>
+                      <a:tailEnd type="none" w="med" len="med"/>
+                    </a:lnL>
+                    <a:lnR w="6350" cap="flat" cmpd="sng" algn="ctr">
+                      <a:solidFill>
+                        <a:srgbClr val="DDD6D0"/>
+                      </a:solidFill>
+                      <a:prstDash val="solid"/>
+                      <a:round/>
+                      <a:headEnd type="none" w="med" len="med"/>
+                      <a:tailEnd type="none" w="med" len="med"/>
+                    </a:lnR>
+                    <a:lnT w="6350" cap="flat" cmpd="sng" algn="ctr">
+                      <a:solidFill>
+                        <a:srgbClr val="DDD6D0"/>
+                      </a:solidFill>
+                      <a:prstDash val="solid"/>
+                      <a:round/>
+                      <a:headEnd type="none" w="med" len="med"/>
+                      <a:tailEnd type="none" w="med" len="med"/>
+                    </a:lnT>
+                    <a:lnB w="6350" cap="flat" cmpd="sng" algn="ctr">
+                      <a:solidFill>
+                        <a:srgbClr val="DDD6D0"/>
+                      </a:solidFill>
+                      <a:prstDash val="solid"/>
+                      <a:round/>
+                      <a:headEnd type="none" w="med" len="med"/>
+                      <a:tailEnd type="none" w="med" len="med"/>
+                    </a:lnB>
+                  </a:tcPr>
+                </a:tc>
+              </a:tr>
             </a:tbl>
           </a:graphicData>
         </a:graphic>
@@ -9276,7 +9603,7 @@
         </p:nvSpPr>
         <p:spPr>
           <a:xfrm>
-            <a:off x="548640" y="3703320"/>
+            <a:off x="548640" y="3840480"/>
             <a:ext cx="6766560" cy="320040"/>
           </a:xfrm>
           <a:prstGeom prst="rect">
@@ -9293,7 +9620,7 @@
               <a:buNone/>
             </a:pPr>
             <a:r>
-              <a:rPr lang="en-US" sz="1050" i="1" dirty="0">
+              <a:rPr lang="en-US" sz="1000" i="1" dirty="0">
                 <a:solidFill>
                   <a:srgbClr val="6E6862"/>
                 </a:solidFill>
@@ -9301,9 +9628,9 @@
                 <a:ea typeface="Calibri" pitchFamily="34" charset="-122"/>
                 <a:cs typeface="Calibri" pitchFamily="34" charset="-120"/>
               </a:rPr>
-              <a:t>McNemar: vs mayoritaria p &lt; 0.001 · vs metadatos p = 0.012 · model_v1 vs best_model p = 0.75 (n.s.)</a:t>
-            </a:r>
-            <a:endParaRPr lang="en-US" sz="1050" dirty="0"/>
+              <a:t>McNemar: vs mayoritaria p &lt; 0.001 · vs metadatos p = 0.012 · model_v1 vs best_model p = 0.75 · LLM vs best_model p = 0.61 (n.s.)</a:t>
+            </a:r>
+            <a:endParaRPr lang="en-US" sz="1000" dirty="0"/>
           </a:p>
         </p:txBody>
       </p:sp>
@@ -9315,7 +9642,7 @@
         </p:nvSpPr>
         <p:spPr>
           <a:xfrm>
-            <a:off x="548640" y="4160520"/>
+            <a:off x="548640" y="4251960"/>
             <a:ext cx="2011680" cy="329184"/>
           </a:xfrm>
           <a:prstGeom prst="rect">
@@ -9354,7 +9681,7 @@
         </p:nvSpPr>
         <p:spPr>
           <a:xfrm>
-            <a:off x="2651760" y="4215384"/>
+            <a:off x="2651760" y="4306824"/>
             <a:ext cx="3218688" cy="219456"/>
           </a:xfrm>
           <a:prstGeom prst="rect">
@@ -9379,7 +9706,7 @@
         </p:nvSpPr>
         <p:spPr>
           <a:xfrm>
-            <a:off x="5916168" y="4160520"/>
+            <a:off x="5916168" y="4251960"/>
             <a:ext cx="640080" cy="329184"/>
           </a:xfrm>
           <a:prstGeom prst="rect">
@@ -9418,7 +9745,7 @@
         </p:nvSpPr>
         <p:spPr>
           <a:xfrm>
-            <a:off x="548640" y="4544568"/>
+            <a:off x="548640" y="4617720"/>
             <a:ext cx="2011680" cy="329184"/>
           </a:xfrm>
           <a:prstGeom prst="rect">
@@ -9457,7 +9784,7 @@
         </p:nvSpPr>
         <p:spPr>
           <a:xfrm>
-            <a:off x="2651760" y="4599432"/>
+            <a:off x="2651760" y="4672584"/>
             <a:ext cx="2977286" cy="219456"/>
           </a:xfrm>
           <a:prstGeom prst="rect">
@@ -9482,7 +9809,7 @@
         </p:nvSpPr>
         <p:spPr>
           <a:xfrm>
-            <a:off x="5674766" y="4544568"/>
+            <a:off x="5674766" y="4617720"/>
             <a:ext cx="640080" cy="329184"/>
           </a:xfrm>
           <a:prstGeom prst="rect">
@@ -9521,7 +9848,7 @@
         </p:nvSpPr>
         <p:spPr>
           <a:xfrm>
-            <a:off x="548640" y="4928616"/>
+            <a:off x="548640" y="4983480"/>
             <a:ext cx="2011680" cy="329184"/>
           </a:xfrm>
           <a:prstGeom prst="rect">
@@ -9560,7 +9887,7 @@
         </p:nvSpPr>
         <p:spPr>
           <a:xfrm>
-            <a:off x="2651760" y="4983480"/>
+            <a:off x="2651760" y="5038344"/>
             <a:ext cx="2856586" cy="219456"/>
           </a:xfrm>
           <a:prstGeom prst="rect">
@@ -9585,7 +9912,7 @@
         </p:nvSpPr>
         <p:spPr>
           <a:xfrm>
-            <a:off x="5554066" y="4928616"/>
+            <a:off x="5554066" y="4983480"/>
             <a:ext cx="640080" cy="329184"/>
           </a:xfrm>
           <a:prstGeom prst="rect">
@@ -9624,7 +9951,7 @@
         </p:nvSpPr>
         <p:spPr>
           <a:xfrm>
-            <a:off x="548640" y="5312664"/>
+            <a:off x="548640" y="5349240"/>
             <a:ext cx="2011680" cy="329184"/>
           </a:xfrm>
           <a:prstGeom prst="rect">
@@ -9663,7 +9990,7 @@
         </p:nvSpPr>
         <p:spPr>
           <a:xfrm>
-            <a:off x="2651760" y="5367528"/>
+            <a:off x="2651760" y="5404104"/>
             <a:ext cx="2293315" cy="219456"/>
           </a:xfrm>
           <a:prstGeom prst="rect">
@@ -9688,7 +10015,7 @@
         </p:nvSpPr>
         <p:spPr>
           <a:xfrm>
-            <a:off x="4990795" y="5312664"/>
+            <a:off x="4990795" y="5349240"/>
             <a:ext cx="640080" cy="329184"/>
           </a:xfrm>
           <a:prstGeom prst="rect">
@@ -9727,7 +10054,7 @@
         </p:nvSpPr>
         <p:spPr>
           <a:xfrm>
-            <a:off x="548640" y="5696712"/>
+            <a:off x="548640" y="5715000"/>
             <a:ext cx="2011680" cy="329184"/>
           </a:xfrm>
           <a:prstGeom prst="rect">
@@ -9766,7 +10093,7 @@
         </p:nvSpPr>
         <p:spPr>
           <a:xfrm>
-            <a:off x="2651760" y="5751576"/>
+            <a:off x="2651760" y="5769864"/>
             <a:ext cx="1327709" cy="219456"/>
           </a:xfrm>
           <a:prstGeom prst="rect">
@@ -9791,7 +10118,7 @@
         </p:nvSpPr>
         <p:spPr>
           <a:xfrm>
-            <a:off x="4025189" y="5696712"/>
+            <a:off x="4025189" y="5715000"/>
             <a:ext cx="640080" cy="329184"/>
           </a:xfrm>
           <a:prstGeom prst="rect">
@@ -9830,7 +10157,7 @@
         </p:nvSpPr>
         <p:spPr>
           <a:xfrm>
-            <a:off x="548640" y="6080760"/>
+            <a:off x="548640" y="6108192"/>
             <a:ext cx="6400800" cy="274320"/>
           </a:xfrm>
           <a:prstGeom prst="rect">
@@ -9870,11 +10197,11 @@
         <p:spPr>
           <a:xfrm>
             <a:off x="7589520" y="1691640"/>
-            <a:ext cx="4069080" cy="2057400"/>
+            <a:ext cx="4069080" cy="1920240"/>
           </a:xfrm>
           <a:prstGeom prst="roundRect">
             <a:avLst>
-              <a:gd name="adj" fmla="val 3556"/>
+              <a:gd name="adj" fmla="val 3810"/>
             </a:avLst>
           </a:prstGeom>
           <a:solidFill>
@@ -9936,7 +10263,7 @@
         <p:spPr>
           <a:xfrm>
             <a:off x="7772400" y="2240280"/>
-            <a:ext cx="3703320" cy="1371600"/>
+            <a:ext cx="3703320" cy="1234440"/>
           </a:xfrm>
           <a:prstGeom prst="rect">
             <a:avLst/>
@@ -9955,7 +10282,7 @@
               <a:buNone/>
             </a:pPr>
             <a:r>
-              <a:rPr lang="en-US" sz="1250" dirty="0">
+              <a:rPr lang="en-US" sz="1200" dirty="0">
                 <a:solidFill>
                   <a:srgbClr val="1B1A19"/>
                 </a:solidFill>
@@ -9965,7 +10292,7 @@
               </a:rPr>
               <a:t>Protección de Datos (léxico propio), Pedagógico y Ética. En el 86 % de las normas la etiqueta correcta está entre las dos candidatas: espacio de decisión de 5 a 2.</a:t>
             </a:r>
-            <a:endParaRPr lang="en-US" sz="1250" dirty="0"/>
+            <a:endParaRPr lang="en-US" sz="1200" dirty="0"/>
           </a:p>
         </p:txBody>
       </p:sp>
@@ -9977,12 +10304,12 @@
         </p:nvSpPr>
         <p:spPr>
           <a:xfrm>
-            <a:off x="7589520" y="3886200"/>
-            <a:ext cx="4069080" cy="2194560"/>
+            <a:off x="7589520" y="3703320"/>
+            <a:ext cx="4069080" cy="1371600"/>
           </a:xfrm>
           <a:prstGeom prst="roundRect">
             <a:avLst>
-              <a:gd name="adj" fmla="val 3333"/>
+              <a:gd name="adj" fmla="val 5333"/>
             </a:avLst>
           </a:prstGeom>
           <a:solidFill>
@@ -10004,7 +10331,7 @@
         </p:nvSpPr>
         <p:spPr>
           <a:xfrm>
-            <a:off x="7772400" y="4023360"/>
+            <a:off x="7772400" y="3840480"/>
             <a:ext cx="3703320" cy="411480"/>
           </a:xfrm>
           <a:prstGeom prst="rect">
@@ -10043,8 +10370,8 @@
         </p:nvSpPr>
         <p:spPr>
           <a:xfrm>
-            <a:off x="7772400" y="4434840"/>
-            <a:ext cx="3703320" cy="1508760"/>
+            <a:off x="7772400" y="4251960"/>
+            <a:ext cx="3703320" cy="685800"/>
           </a:xfrm>
           <a:prstGeom prst="rect">
             <a:avLst/>
@@ -10063,7 +10390,7 @@
               <a:buNone/>
             </a:pPr>
             <a:r>
-              <a:rPr lang="en-US" sz="1250" dirty="0">
+              <a:rPr lang="en-US" sz="1150" dirty="0">
                 <a:solidFill>
                   <a:srgbClr val="1B1A19"/>
                 </a:solidFill>
@@ -10071,9 +10398,117 @@
                 <a:ea typeface="Calibri" pitchFamily="34" charset="-122"/>
                 <a:cs typeface="Calibri" pitchFamily="34" charset="-120"/>
               </a:rPr>
-              <a:t>Administrativo (F1 0.33) y Técnico comparten vocabulario con todo. Portugués 0.42 (n = 12). 35 de 37 errores revisados: normas multidimensionales donde el codificador también dudó (acierto 0.76 con confianza Alta vs 0.41 con Media).</a:t>
-            </a:r>
-            <a:endParaRPr lang="en-US" sz="1250" dirty="0"/>
+              <a:t>Administrativo (F1 0.33) y Técnico comparten vocabulario con todo. Portugués 0.42 (n = 12). 35 de 37 errores revisados eran normas multidimensionales.</a:t>
+            </a:r>
+            <a:endParaRPr lang="en-US" sz="1150" dirty="0"/>
+          </a:p>
+        </p:txBody>
+      </p:sp>
+      <p:sp>
+        <p:nvSpPr>
+          <p:cNvPr id="34" name="Shape 30"/>
+          <p:cNvSpPr/>
+          <p:nvPr/>
+        </p:nvSpPr>
+        <p:spPr>
+          <a:xfrm>
+            <a:off x="7589520" y="5166360"/>
+            <a:ext cx="4069080" cy="1188720"/>
+          </a:xfrm>
+          <a:prstGeom prst="roundRect">
+            <a:avLst>
+              <a:gd name="adj" fmla="val 6154"/>
+            </a:avLst>
+          </a:prstGeom>
+          <a:solidFill>
+            <a:srgbClr val="F3E6EA"/>
+          </a:solidFill>
+          <a:ln w="6350">
+            <a:solidFill>
+              <a:srgbClr val="F3E6EA"/>
+            </a:solidFill>
+            <a:prstDash val="solid"/>
+          </a:ln>
+        </p:spPr>
+      </p:sp>
+      <p:sp>
+        <p:nvSpPr>
+          <p:cNvPr id="35" name="Text 31"/>
+          <p:cNvSpPr txBox="1"/>
+          <p:nvPr/>
+        </p:nvSpPr>
+        <p:spPr>
+          <a:xfrm>
+            <a:off x="7772400" y="5303520"/>
+            <a:ext cx="3703320" cy="411480"/>
+          </a:xfrm>
+          <a:prstGeom prst="rect">
+            <a:avLst/>
+          </a:prstGeom>
+          <a:noFill/>
+          <a:ln/>
+        </p:spPr>
+        <p:txBody>
+          <a:bodyPr wrap="square" lIns="0" tIns="0" rIns="0" bIns="0" rtlCol="0" anchor="t"/>
+          <a:lstStyle/>
+          <a:p>
+            <a:pPr indent="0" marL="0">
+              <a:buNone/>
+            </a:pPr>
+            <a:r>
+              <a:rPr lang="en-US" sz="1500" b="1" dirty="0">
+                <a:solidFill>
+                  <a:srgbClr val="7A1F3D"/>
+                </a:solidFill>
+                <a:latin typeface="Calibri" pitchFamily="34" charset="0"/>
+                <a:ea typeface="Calibri" pitchFamily="34" charset="-122"/>
+                <a:cs typeface="Calibri" pitchFamily="34" charset="-120"/>
+              </a:rPr>
+              <a:t>El LLM no supera al modelo lineal</a:t>
+            </a:r>
+            <a:endParaRPr lang="en-US" sz="1500" dirty="0"/>
+          </a:p>
+        </p:txBody>
+      </p:sp>
+      <p:sp>
+        <p:nvSpPr>
+          <p:cNvPr id="36" name="Text 32"/>
+          <p:cNvSpPr txBox="1"/>
+          <p:nvPr/>
+        </p:nvSpPr>
+        <p:spPr>
+          <a:xfrm>
+            <a:off x="7772400" y="5715000"/>
+            <a:ext cx="3703320" cy="502920"/>
+          </a:xfrm>
+          <a:prstGeom prst="rect">
+            <a:avLst/>
+          </a:prstGeom>
+          <a:noFill/>
+          <a:ln/>
+        </p:spPr>
+        <p:txBody>
+          <a:bodyPr wrap="square" lIns="0" tIns="0" rIns="0" bIns="0" rtlCol="0" anchor="t"/>
+          <a:lstStyle/>
+          <a:p>
+            <a:pPr indent="0" marL="0">
+              <a:spcAft>
+                <a:spcPts val="400"/>
+              </a:spcAft>
+              <a:buNone/>
+            </a:pPr>
+            <a:r>
+              <a:rPr lang="en-US" sz="1100" dirty="0">
+                <a:solidFill>
+                  <a:srgbClr val="1B1A19"/>
+                </a:solidFill>
+                <a:latin typeface="Calibri" pitchFamily="34" charset="0"/>
+                <a:ea typeface="Calibri" pitchFamily="34" charset="-122"/>
+                <a:cs typeface="Calibri" pitchFamily="34" charset="-120"/>
+              </a:rPr>
+              <a:t>Sonnet 5.5 con 15 ejemplos empata en exactitud y κ y pierde en F1 (Técnico 0.18); 6 normas sin respuesta. Sin coste por llamada ni envío de texto a terceros: el lineal gana para operar.</a:t>
+            </a:r>
+            <a:endParaRPr lang="en-US" sz="1100" dirty="0"/>
           </a:p>
         </p:txBody>
       </p:sp>
@@ -11068,7 +11503,7 @@
                 <a:ea typeface="Calibri" pitchFamily="34" charset="-122"/>
                 <a:cs typeface="Calibri" pitchFamily="34" charset="-120"/>
               </a:rPr>
-              <a:t>supera las líneas base (p &lt; 0.05) en prueba ciega</a:t>
+              <a:t>supera las líneas base (p &lt; 0.05) e iguala a un LLM few-shot en prueba ciega</a:t>
             </a:r>
             <a:endParaRPr lang="en-US" sz="1400" dirty="0"/>
           </a:p>
@@ -11308,7 +11743,7 @@
                 <a:ea typeface="Calibri" pitchFamily="34" charset="-122"/>
                 <a:cs typeface="Calibri" pitchFamily="34" charset="-120"/>
               </a:rPr>
-              <a:t>multi-etiqueta · más normas del Caribe · κ humano-humano · rama LLM</a:t>
+              <a:t>multi-etiqueta · más normas del Caribe · κ humano-humano · LLM como segunda opinión en revisión</a:t>
             </a:r>
             <a:endParaRPr lang="en-US" sz="1400" dirty="0"/>
           </a:p>

--- a/results/reports/proyecto_final/Grupo_9_Video_Pitch_5min.pptx
+++ b/results/reports/proyecto_final/Grupo_9_Video_Pitch_5min.pptx
@@ -11894,18 +11894,121 @@
           </a:solidFill>
           <a:ln w="19050">
             <a:solidFill>
-              <a:srgbClr val="E8CFD8"/>
+              <a:srgbClr val="FFFFFF"/>
             </a:solidFill>
-            <a:prstDash val="dash"/>
+            <a:prstDash val="solid"/>
           </a:ln>
         </p:spPr>
       </p:sp>
       <p:sp>
         <p:nvSpPr>
-          <p:cNvPr id="16" name="Text 13"/>
-          <p:cNvSpPr txBox="1"/>
-          <p:nvPr/>
-        </p:nvSpPr>
+          <p:cNvPr id="17" name="Text 14"/>
+          <p:cNvSpPr txBox="1"/>
+          <p:nvPr/>
+        </p:nvSpPr>
+        <p:spPr>
+          <a:xfrm>
+            <a:off x="10149840" y="2743200"/>
+            <a:ext cx="2103120" cy="777240"/>
+          </a:xfrm>
+          <a:prstGeom prst="rect">
+            <a:avLst/>
+          </a:prstGeom>
+          <a:noFill/>
+          <a:ln/>
+        </p:spPr>
+        <p:txBody>
+          <a:bodyPr wrap="square" lIns="0" tIns="0" rIns="0" bIns="0" rtlCol="0" anchor="t"/>
+          <a:lstStyle/>
+          <a:p>
+            <a:pPr algn="ctr" indent="0" marL="0">
+              <a:buNone/>
+            </a:pPr>
+            <a:r>
+              <a:rPr lang="en-US" sz="1100" b="1" dirty="0">
+                <a:solidFill>
+                  <a:srgbClr val="1B1A19"/>
+                </a:solidFill>
+                <a:latin typeface="Calibri" pitchFamily="34" charset="0"/>
+                <a:ea typeface="Calibri" pitchFamily="34" charset="-122"/>
+                <a:cs typeface="Calibri" pitchFamily="34" charset="-120"/>
+              </a:rPr>
+              <a:t>Aplicación web</a:t>
+            </a:r>
+            <a:endParaRPr lang="en-US" sz="1100" dirty="0"/>
+          </a:p>
+          <a:p>
+            <a:pPr algn="ctr" indent="0" marL="0">
+              <a:buNone/>
+            </a:pPr>
+            <a:r>
+              <a:rPr lang="en-US" sz="850" dirty="0">
+                <a:solidFill>
+                  <a:srgbClr val="6E6862"/>
+                </a:solidFill>
+                <a:latin typeface="Calibri" pitchFamily="34" charset="0"/>
+                <a:ea typeface="Calibri" pitchFamily="34" charset="-122"/>
+                <a:cs typeface="Calibri" pitchFamily="34" charset="-120"/>
+              </a:rPr>
+              <a:t>genial-clasificador.streamlit.app</a:t>
+            </a:r>
+            <a:endParaRPr lang="en-US" sz="1100" dirty="0"/>
+          </a:p>
+        </p:txBody>
+      </p:sp>
+      <p:sp>
+        <p:nvSpPr>
+          <p:cNvPr id="18" name="Text 15"/>
+          <p:cNvSpPr txBox="1"/>
+          <p:nvPr/>
+        </p:nvSpPr>
+        <p:spPr>
+          <a:xfrm>
+            <a:off x="548640" y="6217920"/>
+            <a:ext cx="11094415" cy="365760"/>
+          </a:xfrm>
+          <a:prstGeom prst="rect">
+            <a:avLst/>
+          </a:prstGeom>
+          <a:noFill/>
+          <a:ln/>
+        </p:spPr>
+        <p:txBody>
+          <a:bodyPr wrap="square" lIns="0" tIns="0" rIns="0" bIns="0" rtlCol="0" anchor="ctr"/>
+          <a:lstStyle/>
+          <a:p>
+            <a:pPr indent="0" marL="0">
+              <a:buNone/>
+            </a:pPr>
+            <a:r>
+              <a:rPr lang="en-US" sz="1200" dirty="0">
+                <a:solidFill>
+                  <a:srgbClr val="E8CFD8"/>
+                </a:solidFill>
+                <a:latin typeface="Calibri" pitchFamily="34" charset="0"/>
+                <a:ea typeface="Calibri" pitchFamily="34" charset="-122"/>
+                <a:cs typeface="Calibri" pitchFamily="34" charset="-120"/>
+              </a:rPr>
+              <a:t>Jorge Javier Maldonado Mahauad · Melissa Figallo · Grupo 9 · Maestría en IA · UEES · 2026 · Gracias</a:t>
+            </a:r>
+            <a:endParaRPr lang="en-US" sz="1200" dirty="0"/>
+          </a:p>
+        </p:txBody>
+      </p:sp>
+      <p:pic>
+        <p:nvPicPr>
+          <p:cNvPr id="19" name="Picture 18" descr="qr_app.png"/>
+          <p:cNvPicPr>
+            <a:picLocks noChangeAspect="1"/>
+          </p:cNvPicPr>
+          <p:nvPr/>
+        </p:nvPicPr>
+        <p:blipFill>
+          <a:blip r:embed="rId4"/>
+          <a:stretch>
+            <a:fillRect/>
+          </a:stretch>
+        </p:blipFill>
         <p:spPr>
           <a:xfrm>
             <a:off x="10287000" y="914400"/>
@@ -11914,143 +12017,8 @@
           <a:prstGeom prst="rect">
             <a:avLst/>
           </a:prstGeom>
-          <a:noFill/>
-          <a:ln/>
-        </p:spPr>
-        <p:txBody>
-          <a:bodyPr wrap="square" lIns="0" tIns="0" rIns="0" bIns="0" rtlCol="0" anchor="ctr"/>
-          <a:lstStyle/>
-          <a:p>
-            <a:pPr algn="ctr" indent="0" marL="0">
-              <a:buNone/>
-            </a:pPr>
-            <a:r>
-              <a:rPr lang="en-US" sz="900" dirty="0">
-                <a:solidFill>
-                  <a:srgbClr val="6E6862"/>
-                </a:solidFill>
-                <a:latin typeface="Calibri" pitchFamily="34" charset="0"/>
-                <a:ea typeface="Calibri" pitchFamily="34" charset="-122"/>
-                <a:cs typeface="Calibri" pitchFamily="34" charset="-120"/>
-              </a:rPr>
-              <a:t>QR de la aplicación</a:t>
-            </a:r>
-            <a:endParaRPr lang="en-US" sz="900" dirty="0"/>
-          </a:p>
-          <a:p>
-            <a:pPr algn="ctr" indent="0" marL="0">
-              <a:buNone/>
-            </a:pPr>
-            <a:r>
-              <a:rPr lang="en-US" sz="900" dirty="0">
-                <a:solidFill>
-                  <a:srgbClr val="6E6862"/>
-                </a:solidFill>
-                <a:latin typeface="Calibri" pitchFamily="34" charset="0"/>
-                <a:ea typeface="Calibri" pitchFamily="34" charset="-122"/>
-                <a:cs typeface="Calibri" pitchFamily="34" charset="-120"/>
-              </a:rPr>
-              <a:t>(se genera al publicar en Streamlit Community Cloud)</a:t>
-            </a:r>
-            <a:endParaRPr lang="en-US" sz="900" dirty="0"/>
-          </a:p>
-        </p:txBody>
-      </p:sp>
-      <p:sp>
-        <p:nvSpPr>
-          <p:cNvPr id="17" name="Text 14"/>
-          <p:cNvSpPr txBox="1"/>
-          <p:nvPr/>
-        </p:nvSpPr>
-        <p:spPr>
-          <a:xfrm>
-            <a:off x="10149840" y="2743200"/>
-            <a:ext cx="2103120" cy="777240"/>
-          </a:xfrm>
-          <a:prstGeom prst="rect">
-            <a:avLst/>
-          </a:prstGeom>
-          <a:noFill/>
-          <a:ln/>
-        </p:spPr>
-        <p:txBody>
-          <a:bodyPr wrap="square" lIns="0" tIns="0" rIns="0" bIns="0" rtlCol="0" anchor="t"/>
-          <a:lstStyle/>
-          <a:p>
-            <a:pPr algn="ctr" indent="0" marL="0">
-              <a:buNone/>
-            </a:pPr>
-            <a:r>
-              <a:rPr lang="en-US" sz="1100" b="1" dirty="0">
-                <a:solidFill>
-                  <a:srgbClr val="1B1A19"/>
-                </a:solidFill>
-                <a:latin typeface="Calibri" pitchFamily="34" charset="0"/>
-                <a:ea typeface="Calibri" pitchFamily="34" charset="-122"/>
-                <a:cs typeface="Calibri" pitchFamily="34" charset="-120"/>
-              </a:rPr>
-              <a:t>Aplicación web</a:t>
-            </a:r>
-            <a:endParaRPr lang="en-US" sz="1100" dirty="0"/>
-          </a:p>
-          <a:p>
-            <a:pPr algn="ctr" indent="0" marL="0">
-              <a:buNone/>
-            </a:pPr>
-            <a:r>
-              <a:rPr lang="en-US" sz="850" dirty="0">
-                <a:solidFill>
-                  <a:srgbClr val="6E6862"/>
-                </a:solidFill>
-                <a:latin typeface="Calibri" pitchFamily="34" charset="0"/>
-                <a:ea typeface="Calibri" pitchFamily="34" charset="-122"/>
-                <a:cs typeface="Calibri" pitchFamily="34" charset="-120"/>
-              </a:rPr>
-              <a:t>…streamlit.app</a:t>
-            </a:r>
-            <a:endParaRPr lang="en-US" sz="1100" dirty="0"/>
-          </a:p>
-        </p:txBody>
-      </p:sp>
-      <p:sp>
-        <p:nvSpPr>
-          <p:cNvPr id="18" name="Text 15"/>
-          <p:cNvSpPr txBox="1"/>
-          <p:nvPr/>
-        </p:nvSpPr>
-        <p:spPr>
-          <a:xfrm>
-            <a:off x="548640" y="6217920"/>
-            <a:ext cx="11094415" cy="365760"/>
-          </a:xfrm>
-          <a:prstGeom prst="rect">
-            <a:avLst/>
-          </a:prstGeom>
-          <a:noFill/>
-          <a:ln/>
-        </p:spPr>
-        <p:txBody>
-          <a:bodyPr wrap="square" lIns="0" tIns="0" rIns="0" bIns="0" rtlCol="0" anchor="ctr"/>
-          <a:lstStyle/>
-          <a:p>
-            <a:pPr indent="0" marL="0">
-              <a:buNone/>
-            </a:pPr>
-            <a:r>
-              <a:rPr lang="en-US" sz="1200" dirty="0">
-                <a:solidFill>
-                  <a:srgbClr val="E8CFD8"/>
-                </a:solidFill>
-                <a:latin typeface="Calibri" pitchFamily="34" charset="0"/>
-                <a:ea typeface="Calibri" pitchFamily="34" charset="-122"/>
-                <a:cs typeface="Calibri" pitchFamily="34" charset="-120"/>
-              </a:rPr>
-              <a:t>Jorge Javier Maldonado Mahauad · Melissa Figallo · Grupo 9 · Maestría en IA · UEES · 2026 · Gracias</a:t>
-            </a:r>
-            <a:endParaRPr lang="en-US" sz="1200" dirty="0"/>
-          </a:p>
-        </p:txBody>
-      </p:sp>
+        </p:spPr>
+      </p:pic>
     </p:spTree>
   </p:cSld>
   <p:clrMapOvr>
